--- a/docs/pptx/whole/jx-linsubhr-disc-throm3.pptx
+++ b/docs/pptx/whole/jx-linsubhr-disc-throm3.pptx
@@ -5237,7 +5237,7 @@
           <p:spPr>
             <a:xfrm>
               <a:off x="817517" y="1896563"/>
-              <a:ext cx="4933462" cy="82021"/>
+              <a:ext cx="5784860" cy="82021"/>
             </a:xfrm>
             <a:prstGeom prst="rect">
               <a:avLst/>
@@ -5269,7 +5269,7 @@
                   <a:latin typeface="Helvetica"/>
                   <a:cs typeface="Helvetica"/>
                 </a:rPr>
-                <a:t>subHR per 1 mL/min: 0.98 (0.97-0.99)  |  per IQR (Δ = 23.3): 0.59 (0.44-0.80)  |  IQR: [-12.8, 10.5]</a:t>
+                <a:t>subHR per 10 mL/min decline: 1.25 (1.10-1.42)  |  per IQR decline (Δ = 23.3): 1.69 (1.25-2.28)  |  IQR: [-12.8, 10.5]</a:t>
               </a:r>
             </a:p>
           </p:txBody>

--- a/docs/pptx/whole/jx-linsubhr-disc-throm3.pptx
+++ b/docs/pptx/whole/jx-linsubhr-disc-throm3.pptx
@@ -5237,7 +5237,7 @@
           <p:spPr>
             <a:xfrm>
               <a:off x="817517" y="1896563"/>
-              <a:ext cx="5784860" cy="82021"/>
+              <a:ext cx="6394764" cy="82021"/>
             </a:xfrm>
             <a:prstGeom prst="rect">
               <a:avLst/>
@@ -5269,7 +5269,7 @@
                   <a:latin typeface="Helvetica"/>
                   <a:cs typeface="Helvetica"/>
                 </a:rPr>
-                <a:t>subHR per 10 mL/min decline: 1.25 (1.10-1.42)  |  per IQR decline (Δ = 23.3): 1.69 (1.25-2.28)  |  IQR: [-12.8, 10.5]</a:t>
+                <a:t>subHR per 10 mL/min decline: 1.25 (1.10-1.42), p = &lt;0.001  |  per IQR decline (Δ = 23.3): 1.69 (1.25-2.28)  |  IQR: [-12.8, 10.5]</a:t>
               </a:r>
             </a:p>
           </p:txBody>

--- a/docs/pptx/whole/jx-linsubhr-disc-throm3.pptx
+++ b/docs/pptx/whole/jx-linsubhr-disc-throm3.pptx
@@ -5237,7 +5237,7 @@
           <p:spPr>
             <a:xfrm>
               <a:off x="817517" y="1896563"/>
-              <a:ext cx="6394764" cy="82021"/>
+              <a:ext cx="6991776" cy="82021"/>
             </a:xfrm>
             <a:prstGeom prst="rect">
               <a:avLst/>
@@ -5269,7 +5269,7 @@
                   <a:latin typeface="Helvetica"/>
                   <a:cs typeface="Helvetica"/>
                 </a:rPr>
-                <a:t>subHR per 10 mL/min decline: 1.25 (1.10-1.42), p = &lt;0.001  |  per IQR decline (Δ = 23.3): 1.69 (1.25-2.28)  |  IQR: [-12.8, 10.5]</a:t>
+                <a:t>subHR per 10 mL/min decline: 1.25 (1.10-1.42), p_Bonf = 0.003 (n = 6)  |  per IQR decline (Δ = 23.3): 1.69 (1.25-2.28)  |  IQR: [-12.8, 10.5]</a:t>
               </a:r>
             </a:p>
           </p:txBody>
